--- a/docs/slides/Lezione_LUMSA_Reti_TLC_e_IA.pptx
+++ b/docs/slides/Lezione_LUMSA_Reti_TLC_e_IA.pptx
@@ -24728,7 +24728,7 @@
                 <a:ea typeface="Calibri" pitchFamily="34" charset="-122"/>
                 <a:cs typeface="Calibri" pitchFamily="34" charset="-120"/>
               </a:rPr>
-              <a:t>stefano.salsano@cnit.it</a:t>
+              <a:t>stefano.salsano@uniroma2.it</a:t>
             </a:r>
             <a:endParaRPr lang="en-US" sz="1600" dirty="0"/>
           </a:p>
